--- a/probability_and_statistics/2_descriptive/measure_of_dispersion_var_stdDev_Range_Q1_Q2_Q3_IQR/Stats-variance-standard-deviation-of_population-and-sample.pptx
+++ b/probability_and_statistics/2_descriptive/measure_of_dispersion_var_stdDev_Range_Q1_Q2_Q3_IQR/Stats-variance-standard-deviation-of_population-and-sample.pptx
@@ -5,24 +5,25 @@
     <p:sldMasterId id="2147483648" r:id="rId1"/>
   </p:sldMasterIdLst>
   <p:notesMasterIdLst>
-    <p:notesMasterId r:id="rId14"/>
+    <p:notesMasterId r:id="rId15"/>
   </p:notesMasterIdLst>
   <p:handoutMasterIdLst>
-    <p:handoutMasterId r:id="rId15"/>
+    <p:handoutMasterId r:id="rId16"/>
   </p:handoutMasterIdLst>
   <p:sldIdLst>
     <p:sldId id="298" r:id="rId2"/>
     <p:sldId id="264" r:id="rId3"/>
-    <p:sldId id="289" r:id="rId4"/>
-    <p:sldId id="291" r:id="rId5"/>
-    <p:sldId id="292" r:id="rId6"/>
-    <p:sldId id="296" r:id="rId7"/>
-    <p:sldId id="293" r:id="rId8"/>
-    <p:sldId id="299" r:id="rId9"/>
-    <p:sldId id="279" r:id="rId10"/>
-    <p:sldId id="287" r:id="rId11"/>
-    <p:sldId id="297" r:id="rId12"/>
-    <p:sldId id="295" r:id="rId13"/>
+    <p:sldId id="300" r:id="rId4"/>
+    <p:sldId id="289" r:id="rId5"/>
+    <p:sldId id="291" r:id="rId6"/>
+    <p:sldId id="292" r:id="rId7"/>
+    <p:sldId id="296" r:id="rId8"/>
+    <p:sldId id="293" r:id="rId9"/>
+    <p:sldId id="299" r:id="rId10"/>
+    <p:sldId id="279" r:id="rId11"/>
+    <p:sldId id="287" r:id="rId12"/>
+    <p:sldId id="297" r:id="rId13"/>
+    <p:sldId id="295" r:id="rId14"/>
   </p:sldIdLst>
   <p:sldSz cx="12192000" cy="6858000"/>
   <p:notesSz cx="6858000" cy="9144000"/>
@@ -226,7 +227,7 @@
           <a:p>
             <a:fld id="{7BAEECA8-D063-486F-AE31-5020270C1449}" type="datetimeFigureOut">
               <a:rPr lang="en-US" smtClean="0"/>
-              <a:t>4/3/2026</a:t>
+              <a:t>4/29/2026</a:t>
             </a:fld>
             <a:endParaRPr lang="en-US"/>
           </a:p>
@@ -403,7 +404,7 @@
           <a:p>
             <a:fld id="{FA102A78-C460-4462-8104-10395055D720}" type="datetimeFigureOut">
               <a:rPr lang="en-US" smtClean="0"/>
-              <a:t>4/3/2026</a:t>
+              <a:t>4/29/2026</a:t>
             </a:fld>
             <a:endParaRPr lang="en-US"/>
           </a:p>
@@ -759,6 +760,114 @@
   <p:cSld>
     <p:spTree>
       <p:nvGrpSpPr>
+        <p:cNvPr id="1" name="">
+          <a:extLst>
+            <a:ext uri="{FF2B5EF4-FFF2-40B4-BE49-F238E27FC236}">
+              <a16:creationId xmlns:a16="http://schemas.microsoft.com/office/drawing/2014/main" id="{CA9E46CE-D9A8-3D20-F386-B63CB020EE67}"/>
+            </a:ext>
+          </a:extLst>
+        </p:cNvPr>
+        <p:cNvGrpSpPr/>
+        <p:nvPr/>
+      </p:nvGrpSpPr>
+      <p:grpSpPr>
+        <a:xfrm>
+          <a:off x="0" y="0"/>
+          <a:ext cx="0" cy="0"/>
+          <a:chOff x="0" y="0"/>
+          <a:chExt cx="0" cy="0"/>
+        </a:xfrm>
+      </p:grpSpPr>
+      <p:sp>
+        <p:nvSpPr>
+          <p:cNvPr id="2" name="Slide Image Placeholder 1">
+            <a:extLst>
+              <a:ext uri="{FF2B5EF4-FFF2-40B4-BE49-F238E27FC236}">
+                <a16:creationId xmlns:a16="http://schemas.microsoft.com/office/drawing/2014/main" id="{CAE3E230-3320-D4E5-65B7-CD166B615EB1}"/>
+              </a:ext>
+            </a:extLst>
+          </p:cNvPr>
+          <p:cNvSpPr>
+            <a:spLocks noGrp="1" noRot="1" noChangeAspect="1"/>
+          </p:cNvSpPr>
+          <p:nvPr>
+            <p:ph type="sldImg"/>
+          </p:nvPr>
+        </p:nvSpPr>
+        <p:spPr/>
+      </p:sp>
+      <p:sp>
+        <p:nvSpPr>
+          <p:cNvPr id="3" name="Notes Placeholder 2">
+            <a:extLst>
+              <a:ext uri="{FF2B5EF4-FFF2-40B4-BE49-F238E27FC236}">
+                <a16:creationId xmlns:a16="http://schemas.microsoft.com/office/drawing/2014/main" id="{855549DE-33AE-2D2C-EEB6-2AA41978DD5E}"/>
+              </a:ext>
+            </a:extLst>
+          </p:cNvPr>
+          <p:cNvSpPr>
+            <a:spLocks noGrp="1"/>
+          </p:cNvSpPr>
+          <p:nvPr>
+            <p:ph type="body" idx="1"/>
+          </p:nvPr>
+        </p:nvSpPr>
+        <p:spPr/>
+        <p:txBody>
+          <a:bodyPr/>
+          <a:lstStyle/>
+          <a:p>
+            <a:endParaRPr lang="en-US" dirty="0"/>
+          </a:p>
+        </p:txBody>
+      </p:sp>
+      <p:sp>
+        <p:nvSpPr>
+          <p:cNvPr id="4" name="Slide Number Placeholder 3">
+            <a:extLst>
+              <a:ext uri="{FF2B5EF4-FFF2-40B4-BE49-F238E27FC236}">
+                <a16:creationId xmlns:a16="http://schemas.microsoft.com/office/drawing/2014/main" id="{2A17DA15-D059-01FA-691C-A4014D160A62}"/>
+              </a:ext>
+            </a:extLst>
+          </p:cNvPr>
+          <p:cNvSpPr>
+            <a:spLocks noGrp="1"/>
+          </p:cNvSpPr>
+          <p:nvPr>
+            <p:ph type="sldNum" sz="quarter" idx="5"/>
+          </p:nvPr>
+        </p:nvSpPr>
+        <p:spPr/>
+        <p:txBody>
+          <a:bodyPr/>
+          <a:lstStyle/>
+          <a:p>
+            <a:fld id="{52741D09-26B3-4D55-9BC3-ED0100171C7D}" type="slidenum">
+              <a:rPr lang="en-US" smtClean="0"/>
+              <a:t>3</a:t>
+            </a:fld>
+            <a:endParaRPr lang="en-US"/>
+          </a:p>
+        </p:txBody>
+      </p:sp>
+    </p:spTree>
+    <p:extLst>
+      <p:ext uri="{BB962C8B-B14F-4D97-AF65-F5344CB8AC3E}">
+        <p14:creationId xmlns:p14="http://schemas.microsoft.com/office/powerpoint/2010/main" val="442369386"/>
+      </p:ext>
+    </p:extLst>
+  </p:cSld>
+  <p:clrMapOvr>
+    <a:masterClrMapping/>
+  </p:clrMapOvr>
+</p:notes>
+</file>
+
+<file path=ppt/notesSlides/notesSlide3.xml><?xml version="1.0" encoding="utf-8"?>
+<p:notes xmlns:a="http://schemas.openxmlformats.org/drawingml/2006/main" xmlns:r="http://schemas.openxmlformats.org/officeDocument/2006/relationships" xmlns:p="http://schemas.openxmlformats.org/presentationml/2006/main">
+  <p:cSld>
+    <p:spTree>
+      <p:nvGrpSpPr>
         <p:cNvPr id="1" name=""/>
         <p:cNvGrpSpPr/>
         <p:nvPr/>
@@ -819,7 +928,7 @@
           <a:p>
             <a:fld id="{52741D09-26B3-4D55-9BC3-ED0100171C7D}" type="slidenum">
               <a:rPr lang="en-US" smtClean="0"/>
-              <a:t>10</a:t>
+              <a:t>11</a:t>
             </a:fld>
             <a:endParaRPr lang="en-US"/>
           </a:p>
@@ -838,7 +947,7 @@
 </p:notes>
 </file>
 
-<file path=ppt/notesSlides/notesSlide3.xml><?xml version="1.0" encoding="utf-8"?>
+<file path=ppt/notesSlides/notesSlide4.xml><?xml version="1.0" encoding="utf-8"?>
 <p:notes xmlns:a="http://schemas.openxmlformats.org/drawingml/2006/main" xmlns:r="http://schemas.openxmlformats.org/officeDocument/2006/relationships" xmlns:p="http://schemas.openxmlformats.org/presentationml/2006/main">
   <p:cSld>
     <p:spTree>
@@ -927,7 +1036,7 @@
           <a:p>
             <a:fld id="{52741D09-26B3-4D55-9BC3-ED0100171C7D}" type="slidenum">
               <a:rPr lang="en-US" smtClean="0"/>
-              <a:t>11</a:t>
+              <a:t>12</a:t>
             </a:fld>
             <a:endParaRPr lang="en-US"/>
           </a:p>
@@ -1093,7 +1202,7 @@
           <a:p>
             <a:fld id="{6383FAE1-13DE-4511-8C1B-C8AFB720664C}" type="datetimeFigureOut">
               <a:rPr lang="en-US" smtClean="0"/>
-              <a:t>4/3/2026</a:t>
+              <a:t>4/29/2026</a:t>
             </a:fld>
             <a:endParaRPr lang="en-US"/>
           </a:p>
@@ -1291,7 +1400,7 @@
           <a:p>
             <a:fld id="{6383FAE1-13DE-4511-8C1B-C8AFB720664C}" type="datetimeFigureOut">
               <a:rPr lang="en-US" smtClean="0"/>
-              <a:t>4/3/2026</a:t>
+              <a:t>4/29/2026</a:t>
             </a:fld>
             <a:endParaRPr lang="en-US"/>
           </a:p>
@@ -1499,7 +1608,7 @@
           <a:p>
             <a:fld id="{6383FAE1-13DE-4511-8C1B-C8AFB720664C}" type="datetimeFigureOut">
               <a:rPr lang="en-US" smtClean="0"/>
-              <a:t>4/3/2026</a:t>
+              <a:t>4/29/2026</a:t>
             </a:fld>
             <a:endParaRPr lang="en-US"/>
           </a:p>
@@ -1697,7 +1806,7 @@
           <a:p>
             <a:fld id="{6383FAE1-13DE-4511-8C1B-C8AFB720664C}" type="datetimeFigureOut">
               <a:rPr lang="en-US" smtClean="0"/>
-              <a:t>4/3/2026</a:t>
+              <a:t>4/29/2026</a:t>
             </a:fld>
             <a:endParaRPr lang="en-US"/>
           </a:p>
@@ -1972,7 +2081,7 @@
           <a:p>
             <a:fld id="{6383FAE1-13DE-4511-8C1B-C8AFB720664C}" type="datetimeFigureOut">
               <a:rPr lang="en-US" smtClean="0"/>
-              <a:t>4/3/2026</a:t>
+              <a:t>4/29/2026</a:t>
             </a:fld>
             <a:endParaRPr lang="en-US"/>
           </a:p>
@@ -2237,7 +2346,7 @@
           <a:p>
             <a:fld id="{6383FAE1-13DE-4511-8C1B-C8AFB720664C}" type="datetimeFigureOut">
               <a:rPr lang="en-US" smtClean="0"/>
-              <a:t>4/3/2026</a:t>
+              <a:t>4/29/2026</a:t>
             </a:fld>
             <a:endParaRPr lang="en-US"/>
           </a:p>
@@ -2649,7 +2758,7 @@
           <a:p>
             <a:fld id="{6383FAE1-13DE-4511-8C1B-C8AFB720664C}" type="datetimeFigureOut">
               <a:rPr lang="en-US" smtClean="0"/>
-              <a:t>4/3/2026</a:t>
+              <a:t>4/29/2026</a:t>
             </a:fld>
             <a:endParaRPr lang="en-US"/>
           </a:p>
@@ -2790,7 +2899,7 @@
           <a:p>
             <a:fld id="{6383FAE1-13DE-4511-8C1B-C8AFB720664C}" type="datetimeFigureOut">
               <a:rPr lang="en-US" smtClean="0"/>
-              <a:t>4/3/2026</a:t>
+              <a:t>4/29/2026</a:t>
             </a:fld>
             <a:endParaRPr lang="en-US"/>
           </a:p>
@@ -2903,7 +3012,7 @@
           <a:p>
             <a:fld id="{6383FAE1-13DE-4511-8C1B-C8AFB720664C}" type="datetimeFigureOut">
               <a:rPr lang="en-US" smtClean="0"/>
-              <a:t>4/3/2026</a:t>
+              <a:t>4/29/2026</a:t>
             </a:fld>
             <a:endParaRPr lang="en-US"/>
           </a:p>
@@ -3214,7 +3323,7 @@
           <a:p>
             <a:fld id="{6383FAE1-13DE-4511-8C1B-C8AFB720664C}" type="datetimeFigureOut">
               <a:rPr lang="en-US" smtClean="0"/>
-              <a:t>4/3/2026</a:t>
+              <a:t>4/29/2026</a:t>
             </a:fld>
             <a:endParaRPr lang="en-US"/>
           </a:p>
@@ -3505,7 +3614,7 @@
           <a:p>
             <a:fld id="{6383FAE1-13DE-4511-8C1B-C8AFB720664C}" type="datetimeFigureOut">
               <a:rPr lang="en-US" smtClean="0"/>
-              <a:t>4/3/2026</a:t>
+              <a:t>4/29/2026</a:t>
             </a:fld>
             <a:endParaRPr lang="en-US"/>
           </a:p>
@@ -3749,7 +3858,7 @@
           <a:p>
             <a:fld id="{6383FAE1-13DE-4511-8C1B-C8AFB720664C}" type="datetimeFigureOut">
               <a:rPr lang="en-US" smtClean="0"/>
-              <a:t>4/3/2026</a:t>
+              <a:t>4/29/2026</a:t>
             </a:fld>
             <a:endParaRPr lang="en-US"/>
           </a:p>
@@ -4464,6 +4573,274 @@
   <p:cSld>
     <p:spTree>
       <p:nvGrpSpPr>
+        <p:cNvPr id="1" name=""/>
+        <p:cNvGrpSpPr/>
+        <p:nvPr/>
+      </p:nvGrpSpPr>
+      <p:grpSpPr>
+        <a:xfrm>
+          <a:off x="0" y="0"/>
+          <a:ext cx="0" cy="0"/>
+          <a:chOff x="0" y="0"/>
+          <a:chExt cx="0" cy="0"/>
+        </a:xfrm>
+      </p:grpSpPr>
+      <p:sp>
+        <p:nvSpPr>
+          <p:cNvPr id="10" name="TextBox 9">
+            <a:extLst>
+              <a:ext uri="{FF2B5EF4-FFF2-40B4-BE49-F238E27FC236}">
+                <a16:creationId xmlns:a16="http://schemas.microsoft.com/office/drawing/2014/main" id="{91FB00DD-FBD5-FA23-D94D-174B106C5385}"/>
+              </a:ext>
+            </a:extLst>
+          </p:cNvPr>
+          <p:cNvSpPr txBox="1"/>
+          <p:nvPr/>
+        </p:nvSpPr>
+        <p:spPr>
+          <a:xfrm>
+            <a:off x="128016" y="170379"/>
+            <a:ext cx="11201400" cy="4154984"/>
+          </a:xfrm>
+          <a:prstGeom prst="rect">
+            <a:avLst/>
+          </a:prstGeom>
+          <a:noFill/>
+        </p:spPr>
+        <p:txBody>
+          <a:bodyPr wrap="square">
+            <a:spAutoFit/>
+          </a:bodyPr>
+          <a:lstStyle/>
+          <a:p>
+            <a:r>
+              <a:rPr lang="en-US" sz="2400" b="1" dirty="0">
+                <a:solidFill>
+                  <a:schemeClr val="accent6">
+                    <a:lumMod val="60000"/>
+                    <a:lumOff val="40000"/>
+                  </a:schemeClr>
+                </a:solidFill>
+              </a:rPr>
+              <a:t>Why the 2 measure: variance and std. dev.?</a:t>
+            </a:r>
+          </a:p>
+          <a:p>
+            <a:endParaRPr lang="en-US" sz="2400" b="1" dirty="0">
+              <a:solidFill>
+                <a:schemeClr val="accent6">
+                  <a:lumMod val="60000"/>
+                  <a:lumOff val="40000"/>
+                </a:schemeClr>
+              </a:solidFill>
+            </a:endParaRPr>
+          </a:p>
+          <a:p>
+            <a:r>
+              <a:rPr lang="en-US" sz="2400" dirty="0">
+                <a:solidFill>
+                  <a:schemeClr val="accent6">
+                    <a:lumMod val="60000"/>
+                    <a:lumOff val="40000"/>
+                  </a:schemeClr>
+                </a:solidFill>
+              </a:rPr>
+              <a:t>Variance is the average squared deviation from the mean. So, </a:t>
+            </a:r>
+            <a:r>
+              <a:rPr lang="en-US" sz="2400" b="1" dirty="0">
+                <a:solidFill>
+                  <a:schemeClr val="accent6">
+                    <a:lumMod val="60000"/>
+                    <a:lumOff val="40000"/>
+                  </a:schemeClr>
+                </a:solidFill>
+              </a:rPr>
+              <a:t>if your data is in, say, cm, then variance is in square cm (cm²). </a:t>
+            </a:r>
+            <a:r>
+              <a:rPr lang="en-US" sz="2400" dirty="0">
+                <a:solidFill>
+                  <a:schemeClr val="accent6">
+                    <a:lumMod val="60000"/>
+                    <a:lumOff val="40000"/>
+                  </a:schemeClr>
+                </a:solidFill>
+              </a:rPr>
+              <a:t>Squared units aren’t directly interpretable: nobody says “the spread of your height is 100 cm²”.</a:t>
+            </a:r>
+          </a:p>
+          <a:p>
+            <a:endParaRPr lang="en-US" sz="2400" dirty="0">
+              <a:solidFill>
+                <a:schemeClr val="accent6">
+                  <a:lumMod val="60000"/>
+                  <a:lumOff val="40000"/>
+                </a:schemeClr>
+              </a:solidFill>
+            </a:endParaRPr>
+          </a:p>
+          <a:p>
+            <a:r>
+              <a:rPr lang="en-US" sz="2400" dirty="0">
+                <a:solidFill>
+                  <a:schemeClr val="accent6">
+                    <a:lumMod val="60000"/>
+                    <a:lumOff val="40000"/>
+                  </a:schemeClr>
+                </a:solidFill>
+              </a:rPr>
+              <a:t>By taking the square root as in standard deviation, you bring the units back to the original scale: cm -&gt; cm </a:t>
+            </a:r>
+          </a:p>
+          <a:p>
+            <a:pPr marL="285750" indent="-285750">
+              <a:buFont typeface="Arial" panose="020B0604020202020204" pitchFamily="34" charset="0"/>
+              <a:buChar char="•"/>
+            </a:pPr>
+            <a:endParaRPr lang="en-US" sz="2400" dirty="0">
+              <a:solidFill>
+                <a:schemeClr val="accent6">
+                  <a:lumMod val="60000"/>
+                  <a:lumOff val="40000"/>
+                </a:schemeClr>
+              </a:solidFill>
+            </a:endParaRPr>
+          </a:p>
+          <a:p>
+            <a:r>
+              <a:rPr lang="en-US" sz="2400" dirty="0">
+                <a:solidFill>
+                  <a:schemeClr val="accent6">
+                    <a:lumMod val="60000"/>
+                    <a:lumOff val="40000"/>
+                  </a:schemeClr>
+                </a:solidFill>
+              </a:rPr>
+              <a:t>If the mean height is 170 cm and variance is 100 cm²,  then standard deviation would 10 cm:  that is , you can say </a:t>
+            </a:r>
+            <a:r>
+              <a:rPr lang="en-US" sz="2400" b="1" dirty="0">
+                <a:solidFill>
+                  <a:schemeClr val="accent6">
+                    <a:lumMod val="60000"/>
+                    <a:lumOff val="40000"/>
+                  </a:schemeClr>
+                </a:solidFill>
+              </a:rPr>
+              <a:t>“Most data is within 10 cm above or below the mean.”</a:t>
+            </a:r>
+          </a:p>
+        </p:txBody>
+      </p:sp>
+      <p:pic>
+        <p:nvPicPr>
+          <p:cNvPr id="4" name="Picture 3">
+            <a:extLst>
+              <a:ext uri="{FF2B5EF4-FFF2-40B4-BE49-F238E27FC236}">
+                <a16:creationId xmlns:a16="http://schemas.microsoft.com/office/drawing/2014/main" id="{6495780A-3788-F32E-340D-CC324600455A}"/>
+              </a:ext>
+            </a:extLst>
+          </p:cNvPr>
+          <p:cNvPicPr>
+            <a:picLocks noChangeAspect="1"/>
+          </p:cNvPicPr>
+          <p:nvPr/>
+        </p:nvPicPr>
+        <p:blipFill>
+          <a:blip r:embed="rId2"/>
+          <a:stretch>
+            <a:fillRect/>
+          </a:stretch>
+        </p:blipFill>
+        <p:spPr>
+          <a:xfrm>
+            <a:off x="7243545" y="4629544"/>
+            <a:ext cx="4574617" cy="1695853"/>
+          </a:xfrm>
+          <a:prstGeom prst="rect">
+            <a:avLst/>
+          </a:prstGeom>
+        </p:spPr>
+      </p:pic>
+      <p:pic>
+        <p:nvPicPr>
+          <p:cNvPr id="3" name="Picture 2">
+            <a:extLst>
+              <a:ext uri="{FF2B5EF4-FFF2-40B4-BE49-F238E27FC236}">
+                <a16:creationId xmlns:a16="http://schemas.microsoft.com/office/drawing/2014/main" id="{642468CC-9AAC-C490-5589-514AB167B052}"/>
+              </a:ext>
+            </a:extLst>
+          </p:cNvPr>
+          <p:cNvPicPr>
+            <a:picLocks noChangeAspect="1"/>
+          </p:cNvPicPr>
+          <p:nvPr/>
+        </p:nvPicPr>
+        <p:blipFill>
+          <a:blip r:embed="rId3"/>
+          <a:stretch>
+            <a:fillRect/>
+          </a:stretch>
+        </p:blipFill>
+        <p:spPr>
+          <a:xfrm>
+            <a:off x="200102" y="4407408"/>
+            <a:ext cx="6984695" cy="1333920"/>
+          </a:xfrm>
+          <a:prstGeom prst="rect">
+            <a:avLst/>
+          </a:prstGeom>
+        </p:spPr>
+      </p:pic>
+      <p:pic>
+        <p:nvPicPr>
+          <p:cNvPr id="5" name="Picture 4">
+            <a:extLst>
+              <a:ext uri="{FF2B5EF4-FFF2-40B4-BE49-F238E27FC236}">
+                <a16:creationId xmlns:a16="http://schemas.microsoft.com/office/drawing/2014/main" id="{A4C18753-DE5D-13C8-A4BB-D1187DEFD097}"/>
+              </a:ext>
+            </a:extLst>
+          </p:cNvPr>
+          <p:cNvPicPr>
+            <a:picLocks noChangeAspect="1"/>
+          </p:cNvPicPr>
+          <p:nvPr/>
+        </p:nvPicPr>
+        <p:blipFill>
+          <a:blip r:embed="rId4"/>
+          <a:stretch>
+            <a:fillRect/>
+          </a:stretch>
+        </p:blipFill>
+        <p:spPr>
+          <a:xfrm>
+            <a:off x="373838" y="6060542"/>
+            <a:ext cx="4054607" cy="346830"/>
+          </a:xfrm>
+          <a:prstGeom prst="rect">
+            <a:avLst/>
+          </a:prstGeom>
+        </p:spPr>
+      </p:pic>
+    </p:spTree>
+    <p:extLst>
+      <p:ext uri="{BB962C8B-B14F-4D97-AF65-F5344CB8AC3E}">
+        <p14:creationId xmlns:p14="http://schemas.microsoft.com/office/powerpoint/2010/main" val="3281596737"/>
+      </p:ext>
+    </p:extLst>
+  </p:cSld>
+  <p:clrMapOvr>
+    <a:masterClrMapping/>
+  </p:clrMapOvr>
+</p:sld>
+</file>
+
+<file path=ppt/slides/slide11.xml><?xml version="1.0" encoding="utf-8"?>
+<p:sld xmlns:a="http://schemas.openxmlformats.org/drawingml/2006/main" xmlns:r="http://schemas.openxmlformats.org/officeDocument/2006/relationships" xmlns:p="http://schemas.openxmlformats.org/presentationml/2006/main">
+  <p:cSld>
+    <p:spTree>
+      <p:nvGrpSpPr>
         <p:cNvPr id="1" name="">
           <a:extLst>
             <a:ext uri="{FF2B5EF4-FFF2-40B4-BE49-F238E27FC236}">
@@ -4497,7 +4874,7 @@
         <p:spPr>
           <a:xfrm>
             <a:off x="266656" y="3807624"/>
-            <a:ext cx="5278875" cy="830997"/>
+            <a:ext cx="4735111" cy="1015663"/>
           </a:xfrm>
           <a:prstGeom prst="rect">
             <a:avLst/>
@@ -4515,7 +4892,7 @@
               <a:buChar char="•"/>
             </a:pPr>
             <a:r>
-              <a:rPr lang="en-IN" sz="1600" dirty="0">
+              <a:rPr lang="en-IN" sz="2000" dirty="0">
                 <a:solidFill>
                   <a:schemeClr val="accent6">
                     <a:lumMod val="40000"/>
@@ -4526,7 +4903,7 @@
               <a:t>For </a:t>
             </a:r>
             <a:r>
-              <a:rPr lang="en-IN" sz="1600" b="1" dirty="0">
+              <a:rPr lang="en-IN" sz="2000" b="1" dirty="0">
                 <a:solidFill>
                   <a:schemeClr val="accent6">
                     <a:lumMod val="40000"/>
@@ -4537,7 +4914,7 @@
               <a:t>population</a:t>
             </a:r>
             <a:r>
-              <a:rPr lang="en-IN" sz="1600" dirty="0">
+              <a:rPr lang="en-IN" sz="2000" dirty="0">
                 <a:solidFill>
                   <a:schemeClr val="accent6">
                     <a:lumMod val="40000"/>
@@ -4554,7 +4931,7 @@
               <a:buChar char="•"/>
             </a:pPr>
             <a:r>
-              <a:rPr lang="en-IN" sz="1600" dirty="0">
+              <a:rPr lang="en-IN" sz="2000" dirty="0">
                 <a:solidFill>
                   <a:schemeClr val="accent6">
                     <a:lumMod val="40000"/>
@@ -4565,7 +4942,7 @@
               <a:t>For </a:t>
             </a:r>
             <a:r>
-              <a:rPr lang="en-IN" sz="1600" b="1" dirty="0">
+              <a:rPr lang="en-IN" sz="2000" b="1" dirty="0">
                 <a:solidFill>
                   <a:schemeClr val="accent6">
                     <a:lumMod val="40000"/>
@@ -4576,7 +4953,7 @@
               <a:t>sample</a:t>
             </a:r>
             <a:r>
-              <a:rPr lang="en-IN" sz="1600" dirty="0">
+              <a:rPr lang="en-IN" sz="2000" dirty="0">
                 <a:solidFill>
                   <a:schemeClr val="accent6">
                     <a:lumMod val="40000"/>
@@ -4589,7 +4966,7 @@
           </a:p>
           <a:p>
             <a:r>
-              <a:rPr lang="en-IN" sz="1600" dirty="0">
+              <a:rPr lang="en-IN" sz="2000" dirty="0">
                 <a:solidFill>
                   <a:schemeClr val="accent6">
                     <a:lumMod val="40000"/>
@@ -4655,7 +5032,7 @@
         <p:spPr>
           <a:xfrm>
             <a:off x="162866" y="2377990"/>
-            <a:ext cx="2660931" cy="753597"/>
+            <a:ext cx="3711088" cy="1051010"/>
           </a:xfrm>
           <a:prstGeom prst="rect">
             <a:avLst/>
@@ -4714,8 +5091,8 @@
         </p:blipFill>
         <p:spPr>
           <a:xfrm>
-            <a:off x="6263640" y="2155959"/>
-            <a:ext cx="5970873" cy="1353747"/>
+            <a:off x="5303520" y="2597447"/>
+            <a:ext cx="6986155" cy="1583937"/>
           </a:xfrm>
           <a:prstGeom prst="rect">
             <a:avLst/>
@@ -4744,8 +5121,8 @@
         </p:blipFill>
         <p:spPr>
           <a:xfrm>
-            <a:off x="3821544" y="3838066"/>
-            <a:ext cx="4548911" cy="2841622"/>
+            <a:off x="5001767" y="4318518"/>
+            <a:ext cx="3535035" cy="2208272"/>
           </a:xfrm>
           <a:prstGeom prst="rect">
             <a:avLst/>
@@ -4812,13 +5189,15 @@
               </a:ext>
             </a:extLst>
           </p:cNvPr>
-          <p:cNvCxnSpPr/>
+          <p:cNvCxnSpPr>
+            <a:cxnSpLocks/>
+          </p:cNvCxnSpPr>
           <p:nvPr/>
         </p:nvCxnSpPr>
         <p:spPr>
           <a:xfrm>
-            <a:off x="6181344" y="699311"/>
-            <a:ext cx="0" cy="2802869"/>
+            <a:off x="6300216" y="629048"/>
+            <a:ext cx="0" cy="1895541"/>
           </a:xfrm>
           <a:prstGeom prst="line">
             <a:avLst/>
@@ -4852,7 +5231,7 @@
 </p:sld>
 </file>
 
-<file path=ppt/slides/slide11.xml><?xml version="1.0" encoding="utf-8"?>
+<file path=ppt/slides/slide12.xml><?xml version="1.0" encoding="utf-8"?>
 <p:sld xmlns:a="http://schemas.openxmlformats.org/drawingml/2006/main" xmlns:r="http://schemas.openxmlformats.org/officeDocument/2006/relationships" xmlns:p="http://schemas.openxmlformats.org/presentationml/2006/main">
   <p:cSld>
     <p:spTree>
@@ -4875,6 +5254,36 @@
           <a:chExt cx="0" cy="0"/>
         </a:xfrm>
       </p:grpSpPr>
+      <p:pic>
+        <p:nvPicPr>
+          <p:cNvPr id="3" name="Picture 2">
+            <a:extLst>
+              <a:ext uri="{FF2B5EF4-FFF2-40B4-BE49-F238E27FC236}">
+                <a16:creationId xmlns:a16="http://schemas.microsoft.com/office/drawing/2014/main" id="{7F6172D4-F4E2-5099-BD68-CEFB5F35A76B}"/>
+              </a:ext>
+            </a:extLst>
+          </p:cNvPr>
+          <p:cNvPicPr>
+            <a:picLocks noChangeAspect="1"/>
+          </p:cNvPicPr>
+          <p:nvPr/>
+        </p:nvPicPr>
+        <p:blipFill>
+          <a:blip r:embed="rId3"/>
+          <a:stretch>
+            <a:fillRect/>
+          </a:stretch>
+        </p:blipFill>
+        <p:spPr>
+          <a:xfrm>
+            <a:off x="6859095" y="2138594"/>
+            <a:ext cx="5332905" cy="3331369"/>
+          </a:xfrm>
+          <a:prstGeom prst="rect">
+            <a:avLst/>
+          </a:prstGeom>
+        </p:spPr>
+      </p:pic>
       <p:sp>
         <p:nvSpPr>
           <p:cNvPr id="2" name="Title 1">
@@ -4932,35 +5341,35 @@
           <p:nvPr>
             <p:extLst>
               <p:ext uri="{D42A27DB-BD31-4B8C-83A1-F6EECF244321}">
-                <p14:modId xmlns:p14="http://schemas.microsoft.com/office/powerpoint/2010/main" val="1809157714"/>
+                <p14:modId xmlns:p14="http://schemas.microsoft.com/office/powerpoint/2010/main" val="1587187364"/>
               </p:ext>
             </p:extLst>
           </p:nvPr>
         </p:nvGraphicFramePr>
         <p:xfrm>
-          <a:off x="384048" y="1798863"/>
-          <a:ext cx="6475047" cy="4572000"/>
+          <a:off x="51028" y="2236649"/>
+          <a:ext cx="7488936" cy="3810000"/>
         </p:xfrm>
         <a:graphic>
           <a:graphicData uri="http://schemas.openxmlformats.org/drawingml/2006/table">
             <a:tbl>
               <a:tblPr/>
               <a:tblGrid>
-                <a:gridCol w="2532888">
+                <a:gridCol w="3317792">
                   <a:extLst>
                     <a:ext uri="{9D8B030D-6E8A-4147-A177-3AD203B41FA5}">
                       <a16:colId xmlns:a16="http://schemas.microsoft.com/office/drawing/2014/main" val="4071079708"/>
                     </a:ext>
                   </a:extLst>
                 </a:gridCol>
-                <a:gridCol w="1837944">
+                <a:gridCol w="1984248">
                   <a:extLst>
                     <a:ext uri="{9D8B030D-6E8A-4147-A177-3AD203B41FA5}">
                       <a16:colId xmlns:a16="http://schemas.microsoft.com/office/drawing/2014/main" val="3537516863"/>
                     </a:ext>
                   </a:extLst>
                 </a:gridCol>
-                <a:gridCol w="2104215">
+                <a:gridCol w="2186896">
                   <a:extLst>
                     <a:ext uri="{9D8B030D-6E8A-4147-A177-3AD203B41FA5}">
                       <a16:colId xmlns:a16="http://schemas.microsoft.com/office/drawing/2014/main" val="1749636756"/>
@@ -4976,7 +5385,7 @@
                     <a:p>
                       <a:pPr algn="ctr"/>
                       <a:r>
-                        <a:rPr lang="en-US" sz="1800" b="1" u="sng" dirty="0">
+                        <a:rPr lang="en-US" sz="2000" b="1" u="sng" dirty="0">
                           <a:solidFill>
                             <a:schemeClr val="accent6">
                               <a:lumMod val="20000"/>
@@ -5027,7 +5436,7 @@
                     <a:p>
                       <a:pPr algn="ctr"/>
                       <a:r>
-                        <a:rPr lang="en-US" sz="1800" b="1" u="sng" dirty="0">
+                        <a:rPr lang="en-US" sz="2000" b="1" u="sng" dirty="0">
                           <a:solidFill>
                             <a:schemeClr val="accent6">
                               <a:lumMod val="20000"/>
@@ -5078,7 +5487,7 @@
                     <a:p>
                       <a:pPr algn="ctr"/>
                       <a:r>
-                        <a:rPr lang="en-US" sz="1800" b="1" u="sng" dirty="0">
+                        <a:rPr lang="en-US" sz="2000" b="1" u="sng" dirty="0">
                           <a:solidFill>
                             <a:schemeClr val="accent6">
                               <a:lumMod val="20000"/>
@@ -5136,7 +5545,7 @@
                     <a:p>
                       <a:pPr algn="ctr"/>
                       <a:r>
-                        <a:rPr lang="en-US" sz="1800" dirty="0">
+                        <a:rPr lang="en-US" sz="2000" dirty="0">
                           <a:solidFill>
                             <a:schemeClr val="accent6">
                               <a:lumMod val="20000"/>
@@ -5147,7 +5556,7 @@
                         <a:t>You recorded heights of </a:t>
                       </a:r>
                       <a:r>
-                        <a:rPr lang="en-US" sz="1800" b="1" dirty="0">
+                        <a:rPr lang="en-US" sz="2000" b="1" dirty="0">
                           <a:solidFill>
                             <a:schemeClr val="accent4">
                               <a:lumMod val="60000"/>
@@ -5158,7 +5567,7 @@
                         <a:t>all 100 students</a:t>
                       </a:r>
                       <a:r>
-                        <a:rPr lang="en-US" sz="1800" dirty="0">
+                        <a:rPr lang="en-US" sz="2000" dirty="0">
                           <a:solidFill>
                             <a:schemeClr val="accent6">
                               <a:lumMod val="20000"/>
@@ -5209,7 +5618,7 @@
                     <a:p>
                       <a:pPr algn="ctr"/>
                       <a:r>
-                        <a:rPr lang="en-US" sz="1800" dirty="0">
+                        <a:rPr lang="en-US" sz="2000" dirty="0">
                           <a:solidFill>
                             <a:schemeClr val="accent6">
                               <a:lumMod val="20000"/>
@@ -5260,7 +5669,7 @@
                     <a:p>
                       <a:pPr algn="ctr"/>
                       <a:r>
-                        <a:rPr lang="en-US" sz="1800" dirty="0">
+                        <a:rPr lang="en-US" sz="2000" dirty="0">
                           <a:solidFill>
                             <a:schemeClr val="accent6">
                               <a:lumMod val="20000"/>
@@ -5318,7 +5727,7 @@
                     <a:p>
                       <a:pPr algn="ctr"/>
                       <a:r>
-                        <a:rPr lang="en-US" sz="1800" dirty="0">
+                        <a:rPr lang="en-US" sz="2000" dirty="0">
                           <a:solidFill>
                             <a:schemeClr val="accent6">
                               <a:lumMod val="20000"/>
@@ -5329,7 +5738,7 @@
                         <a:t>You took a </a:t>
                       </a:r>
                       <a:r>
-                        <a:rPr lang="en-US" sz="1800" b="1" dirty="0">
+                        <a:rPr lang="en-US" sz="2000" b="1" dirty="0">
                           <a:solidFill>
                             <a:schemeClr val="accent4">
                               <a:lumMod val="60000"/>
@@ -5340,7 +5749,7 @@
                         <a:t>random sample of 10 students</a:t>
                       </a:r>
                       <a:r>
-                        <a:rPr lang="en-US" sz="1800" dirty="0">
+                        <a:rPr lang="en-US" sz="2000" dirty="0">
                           <a:solidFill>
                             <a:schemeClr val="accent6">
                               <a:lumMod val="20000"/>
@@ -5391,7 +5800,7 @@
                     <a:p>
                       <a:pPr algn="ctr"/>
                       <a:r>
-                        <a:rPr lang="en-US" sz="1800" dirty="0">
+                        <a:rPr lang="en-US" sz="2000" dirty="0">
                           <a:solidFill>
                             <a:schemeClr val="accent6">
                               <a:lumMod val="20000"/>
@@ -5442,7 +5851,7 @@
                     <a:p>
                       <a:pPr algn="ctr"/>
                       <a:r>
-                        <a:rPr lang="en-US" sz="1800">
+                        <a:rPr lang="en-US" sz="2000">
                           <a:solidFill>
                             <a:schemeClr val="accent6">
                               <a:lumMod val="20000"/>
@@ -5500,7 +5909,7 @@
                     <a:p>
                       <a:pPr algn="ctr"/>
                       <a:r>
-                        <a:rPr lang="en-US" sz="1800" dirty="0">
+                        <a:rPr lang="en-US" sz="2000" dirty="0">
                           <a:solidFill>
                             <a:schemeClr val="accent6">
                               <a:lumMod val="20000"/>
@@ -5511,7 +5920,7 @@
                         <a:t>You analyzed </a:t>
                       </a:r>
                       <a:r>
-                        <a:rPr lang="en-US" sz="1800" b="1" dirty="0">
+                        <a:rPr lang="en-US" sz="2000" b="1" dirty="0">
                           <a:solidFill>
                             <a:schemeClr val="accent4">
                               <a:lumMod val="60000"/>
@@ -5522,7 +5931,7 @@
                         <a:t>every</a:t>
                       </a:r>
                       <a:r>
-                        <a:rPr lang="en-US" sz="1800" dirty="0">
+                        <a:rPr lang="en-US" sz="2000" dirty="0">
                           <a:solidFill>
                             <a:schemeClr val="accent6">
                               <a:lumMod val="20000"/>
@@ -5573,7 +5982,7 @@
                     <a:p>
                       <a:pPr algn="ctr"/>
                       <a:r>
-                        <a:rPr lang="en-US" sz="1800" dirty="0">
+                        <a:rPr lang="en-US" sz="2000" dirty="0">
                           <a:solidFill>
                             <a:schemeClr val="accent6">
                               <a:lumMod val="20000"/>
@@ -5624,7 +6033,7 @@
                     <a:p>
                       <a:pPr algn="ctr"/>
                       <a:r>
-                        <a:rPr lang="en-US" sz="1800">
+                        <a:rPr lang="en-US" sz="2000">
                           <a:solidFill>
                             <a:schemeClr val="accent6">
                               <a:lumMod val="20000"/>
@@ -5682,7 +6091,7 @@
                     <a:p>
                       <a:pPr algn="ctr"/>
                       <a:r>
-                        <a:rPr lang="en-US" sz="1800" dirty="0">
+                        <a:rPr lang="en-US" sz="2000" dirty="0">
                           <a:solidFill>
                             <a:schemeClr val="accent6">
                               <a:lumMod val="20000"/>
@@ -5693,7 +6102,7 @@
                         <a:t>You tested </a:t>
                       </a:r>
                       <a:r>
-                        <a:rPr lang="en-US" sz="1800" b="1" dirty="0">
+                        <a:rPr lang="en-US" sz="2000" b="1" dirty="0">
                           <a:solidFill>
                             <a:schemeClr val="accent4">
                               <a:lumMod val="60000"/>
@@ -5704,7 +6113,7 @@
                         <a:t>20 random products</a:t>
                       </a:r>
                       <a:r>
-                        <a:rPr lang="en-US" sz="1800" dirty="0">
+                        <a:rPr lang="en-US" sz="2000" dirty="0">
                           <a:solidFill>
                             <a:schemeClr val="accent6">
                               <a:lumMod val="20000"/>
@@ -5755,7 +6164,7 @@
                     <a:p>
                       <a:pPr algn="ctr"/>
                       <a:r>
-                        <a:rPr lang="en-US" sz="1800" dirty="0">
+                        <a:rPr lang="en-US" sz="2000" dirty="0">
                           <a:solidFill>
                             <a:schemeClr val="accent6">
                               <a:lumMod val="20000"/>
@@ -5806,7 +6215,7 @@
                     <a:p>
                       <a:pPr algn="ctr"/>
                       <a:r>
-                        <a:rPr lang="en-US" sz="1800" dirty="0">
+                        <a:rPr lang="en-US" sz="2000" dirty="0">
                           <a:solidFill>
                             <a:schemeClr val="accent6">
                               <a:lumMod val="20000"/>
@@ -5875,7 +6284,7 @@
         <p:spPr>
           <a:xfrm>
             <a:off x="239224" y="780960"/>
-            <a:ext cx="9572288" cy="646331"/>
+            <a:ext cx="11568728" cy="1200329"/>
           </a:xfrm>
           <a:prstGeom prst="rect">
             <a:avLst/>
@@ -5893,7 +6302,7 @@
               <a:buChar char="•"/>
             </a:pPr>
             <a:r>
-              <a:rPr lang="en-US" dirty="0">
+              <a:rPr lang="en-US" sz="2400" dirty="0">
                 <a:solidFill>
                   <a:schemeClr val="accent6">
                     <a:lumMod val="40000"/>
@@ -5904,7 +6313,7 @@
               <a:t>If you are analyzing </a:t>
             </a:r>
             <a:r>
-              <a:rPr lang="en-US" b="1" dirty="0">
+              <a:rPr lang="en-US" sz="2400" b="1" dirty="0">
                 <a:solidFill>
                   <a:schemeClr val="accent6">
                     <a:lumMod val="40000"/>
@@ -5915,7 +6324,7 @@
               <a:t>all the data from the group </a:t>
             </a:r>
             <a:r>
-              <a:rPr lang="en-US" dirty="0">
+              <a:rPr lang="en-US" sz="2400" dirty="0">
                 <a:solidFill>
                   <a:schemeClr val="accent6">
                     <a:lumMod val="40000"/>
@@ -5926,7 +6335,7 @@
               <a:t>you're interested in, then use </a:t>
             </a:r>
             <a:r>
-              <a:rPr lang="en-US" b="1" dirty="0">
+              <a:rPr lang="en-US" sz="2400" b="1" dirty="0">
                 <a:solidFill>
                   <a:schemeClr val="accent6">
                     <a:lumMod val="40000"/>
@@ -5937,7 +6346,7 @@
               <a:t>population</a:t>
             </a:r>
             <a:r>
-              <a:rPr lang="en-US" dirty="0">
+              <a:rPr lang="en-US" sz="2400" dirty="0">
                 <a:solidFill>
                   <a:schemeClr val="accent6">
                     <a:lumMod val="40000"/>
@@ -5954,7 +6363,7 @@
               <a:buChar char="•"/>
             </a:pPr>
             <a:r>
-              <a:rPr lang="en-US" dirty="0">
+              <a:rPr lang="en-US" sz="2400" dirty="0">
                 <a:solidFill>
                   <a:schemeClr val="accent6">
                     <a:lumMod val="40000"/>
@@ -5965,7 +6374,7 @@
               <a:t>If you are analyzing a </a:t>
             </a:r>
             <a:r>
-              <a:rPr lang="en-US" b="1" dirty="0">
+              <a:rPr lang="en-US" sz="2400" b="1" dirty="0">
                 <a:solidFill>
                   <a:schemeClr val="accent6">
                     <a:lumMod val="40000"/>
@@ -5976,7 +6385,7 @@
               <a:t>subset (a sample) of the full group</a:t>
             </a:r>
             <a:r>
-              <a:rPr lang="en-US" dirty="0">
+              <a:rPr lang="en-US" sz="2400" dirty="0">
                 <a:solidFill>
                   <a:schemeClr val="accent6">
                     <a:lumMod val="40000"/>
@@ -5987,7 +6396,7 @@
               <a:t> and trying to generalize, then use </a:t>
             </a:r>
             <a:r>
-              <a:rPr lang="en-US" b="1" dirty="0">
+              <a:rPr lang="en-US" sz="2400" b="1" dirty="0">
                 <a:solidFill>
                   <a:schemeClr val="accent6">
                     <a:lumMod val="40000"/>
@@ -5998,7 +6407,7 @@
               <a:t>sample</a:t>
             </a:r>
             <a:r>
-              <a:rPr lang="en-US" dirty="0">
+              <a:rPr lang="en-US" sz="2400" dirty="0">
                 <a:solidFill>
                   <a:schemeClr val="accent6">
                     <a:lumMod val="40000"/>
@@ -6011,36 +6420,6 @@
           </a:p>
         </p:txBody>
       </p:sp>
-      <p:pic>
-        <p:nvPicPr>
-          <p:cNvPr id="3" name="Picture 2">
-            <a:extLst>
-              <a:ext uri="{FF2B5EF4-FFF2-40B4-BE49-F238E27FC236}">
-                <a16:creationId xmlns:a16="http://schemas.microsoft.com/office/drawing/2014/main" id="{7F6172D4-F4E2-5099-BD68-CEFB5F35A76B}"/>
-              </a:ext>
-            </a:extLst>
-          </p:cNvPr>
-          <p:cNvPicPr>
-            <a:picLocks noChangeAspect="1"/>
-          </p:cNvPicPr>
-          <p:nvPr/>
-        </p:nvPicPr>
-        <p:blipFill>
-          <a:blip r:embed="rId3"/>
-          <a:stretch>
-            <a:fillRect/>
-          </a:stretch>
-        </p:blipFill>
-        <p:spPr>
-          <a:xfrm>
-            <a:off x="6859095" y="2138594"/>
-            <a:ext cx="5332905" cy="3331369"/>
-          </a:xfrm>
-          <a:prstGeom prst="rect">
-            <a:avLst/>
-          </a:prstGeom>
-        </p:spPr>
-      </p:pic>
     </p:spTree>
     <p:extLst>
       <p:ext uri="{BB962C8B-B14F-4D97-AF65-F5344CB8AC3E}">
@@ -6054,7 +6433,7 @@
 </p:sld>
 </file>
 
-<file path=ppt/slides/slide12.xml><?xml version="1.0" encoding="utf-8"?>
+<file path=ppt/slides/slide13.xml><?xml version="1.0" encoding="utf-8"?>
 <p:sld xmlns:a="http://schemas.openxmlformats.org/drawingml/2006/main" xmlns:r="http://schemas.openxmlformats.org/officeDocument/2006/relationships" xmlns:p="http://schemas.openxmlformats.org/presentationml/2006/main">
   <p:cSld>
     <p:spTree>
@@ -6130,6 +6509,36 @@
           <a:chExt cx="0" cy="0"/>
         </a:xfrm>
       </p:grpSpPr>
+      <p:pic>
+        <p:nvPicPr>
+          <p:cNvPr id="7" name="Picture 6">
+            <a:extLst>
+              <a:ext uri="{FF2B5EF4-FFF2-40B4-BE49-F238E27FC236}">
+                <a16:creationId xmlns:a16="http://schemas.microsoft.com/office/drawing/2014/main" id="{2CD02E9C-7024-EF92-39D1-96FC3D9B6BDF}"/>
+              </a:ext>
+            </a:extLst>
+          </p:cNvPr>
+          <p:cNvPicPr>
+            <a:picLocks noChangeAspect="1"/>
+          </p:cNvPicPr>
+          <p:nvPr/>
+        </p:nvPicPr>
+        <p:blipFill>
+          <a:blip r:embed="rId3"/>
+          <a:stretch>
+            <a:fillRect/>
+          </a:stretch>
+        </p:blipFill>
+        <p:spPr>
+          <a:xfrm>
+            <a:off x="9275712" y="4285285"/>
+            <a:ext cx="2880411" cy="1414858"/>
+          </a:xfrm>
+          <a:prstGeom prst="rect">
+            <a:avLst/>
+          </a:prstGeom>
+        </p:spPr>
+      </p:pic>
       <p:sp>
         <p:nvSpPr>
           <p:cNvPr id="2" name="Title 1">
@@ -6181,8 +6590,8 @@
           </a:p>
         </p:txBody>
       </p:sp>
-      <mc:AlternateContent xmlns:mc="http://schemas.openxmlformats.org/markup-compatibility/2006">
-        <mc:Choice xmlns:a14="http://schemas.microsoft.com/office/drawing/2010/main" Requires="a14">
+      <mc:AlternateContent xmlns:mc="http://schemas.openxmlformats.org/markup-compatibility/2006" xmlns:a14="http://schemas.microsoft.com/office/drawing/2010/main">
+        <mc:Choice Requires="a14">
           <p:sp>
             <p:nvSpPr>
               <p:cNvPr id="5" name="TextBox 4">
@@ -6198,7 +6607,7 @@
             <p:spPr>
               <a:xfrm>
                 <a:off x="314633" y="876626"/>
-                <a:ext cx="11215951" cy="5324535"/>
+                <a:ext cx="11215951" cy="2862322"/>
               </a:xfrm>
               <a:prstGeom prst="rect">
                 <a:avLst/>
@@ -6657,26 +7066,374 @@
                   </a:solidFill>
                 </a:endParaRPr>
               </a:p>
+            </p:txBody>
+          </p:sp>
+        </mc:Choice>
+        <mc:Fallback xmlns="">
+          <p:sp>
+            <p:nvSpPr>
+              <p:cNvPr id="5" name="TextBox 4">
+                <a:extLst>
+                  <a:ext uri="{FF2B5EF4-FFF2-40B4-BE49-F238E27FC236}">
+                    <a16:creationId xmlns:a16="http://schemas.microsoft.com/office/drawing/2014/main" id="{489CF35C-365B-DE94-084A-E84350FD26B2}"/>
+                  </a:ext>
+                </a:extLst>
+              </p:cNvPr>
+              <p:cNvSpPr txBox="1">
+                <a:spLocks noRot="1" noChangeAspect="1" noMove="1" noResize="1" noEditPoints="1" noAdjustHandles="1" noChangeArrowheads="1" noChangeShapeType="1" noTextEdit="1"/>
+              </p:cNvSpPr>
+              <p:nvPr/>
+            </p:nvSpPr>
+            <p:spPr>
+              <a:xfrm>
+                <a:off x="314633" y="876626"/>
+                <a:ext cx="11215951" cy="2862322"/>
+              </a:xfrm>
+              <a:prstGeom prst="rect">
+                <a:avLst/>
+              </a:prstGeom>
+              <a:blipFill>
+                <a:blip r:embed="rId4"/>
+                <a:stretch>
+                  <a:fillRect l="-598" t="-1279" r="-326" b="-2985"/>
+                </a:stretch>
+              </a:blipFill>
+            </p:spPr>
+            <p:txBody>
+              <a:bodyPr/>
+              <a:lstStyle/>
               <a:p>
-                <a:endParaRPr lang="en-IN" sz="2000" dirty="0">
-                  <a:solidFill>
-                    <a:schemeClr val="accent6">
-                      <a:lumMod val="40000"/>
-                      <a:lumOff val="60000"/>
-                    </a:schemeClr>
-                  </a:solidFill>
-                </a:endParaRPr>
+                <a:r>
+                  <a:rPr lang="en-US">
+                    <a:noFill/>
+                  </a:rPr>
+                  <a:t> </a:t>
+                </a:r>
               </a:p>
-              <a:p>
-                <a:endParaRPr lang="en-IN" sz="2000" dirty="0">
-                  <a:solidFill>
-                    <a:schemeClr val="accent6">
-                      <a:lumMod val="40000"/>
-                      <a:lumOff val="60000"/>
-                    </a:schemeClr>
-                  </a:solidFill>
-                </a:endParaRPr>
-              </a:p>
+            </p:txBody>
+          </p:sp>
+        </mc:Fallback>
+      </mc:AlternateContent>
+      <p:pic>
+        <p:nvPicPr>
+          <p:cNvPr id="4" name="Picture 3">
+            <a:extLst>
+              <a:ext uri="{FF2B5EF4-FFF2-40B4-BE49-F238E27FC236}">
+                <a16:creationId xmlns:a16="http://schemas.microsoft.com/office/drawing/2014/main" id="{E9571FDD-5811-8BEB-CCA6-11D3E57C3662}"/>
+              </a:ext>
+            </a:extLst>
+          </p:cNvPr>
+          <p:cNvPicPr>
+            <a:picLocks noChangeAspect="1"/>
+          </p:cNvPicPr>
+          <p:nvPr/>
+        </p:nvPicPr>
+        <p:blipFill>
+          <a:blip r:embed="rId5"/>
+          <a:stretch>
+            <a:fillRect/>
+          </a:stretch>
+        </p:blipFill>
+        <p:spPr>
+          <a:xfrm>
+            <a:off x="817553" y="1641020"/>
+            <a:ext cx="5793477" cy="1106424"/>
+          </a:xfrm>
+          <a:prstGeom prst="rect">
+            <a:avLst/>
+          </a:prstGeom>
+        </p:spPr>
+      </p:pic>
+      <p:pic>
+        <p:nvPicPr>
+          <p:cNvPr id="9" name="Picture 8">
+            <a:extLst>
+              <a:ext uri="{FF2B5EF4-FFF2-40B4-BE49-F238E27FC236}">
+                <a16:creationId xmlns:a16="http://schemas.microsoft.com/office/drawing/2014/main" id="{80FF1A40-F570-34F5-BFE3-CE0D4C7E647A}"/>
+              </a:ext>
+            </a:extLst>
+          </p:cNvPr>
+          <p:cNvPicPr>
+            <a:picLocks noChangeAspect="1"/>
+          </p:cNvPicPr>
+          <p:nvPr/>
+        </p:nvPicPr>
+        <p:blipFill>
+          <a:blip r:embed="rId6"/>
+          <a:stretch>
+            <a:fillRect/>
+          </a:stretch>
+        </p:blipFill>
+        <p:spPr>
+          <a:xfrm>
+            <a:off x="86033" y="4031039"/>
+            <a:ext cx="9668256" cy="2648649"/>
+          </a:xfrm>
+          <a:prstGeom prst="rect">
+            <a:avLst/>
+          </a:prstGeom>
+        </p:spPr>
+      </p:pic>
+      <p:pic>
+        <p:nvPicPr>
+          <p:cNvPr id="6" name="Picture 5">
+            <a:extLst>
+              <a:ext uri="{FF2B5EF4-FFF2-40B4-BE49-F238E27FC236}">
+                <a16:creationId xmlns:a16="http://schemas.microsoft.com/office/drawing/2014/main" id="{08126BA9-936D-E16D-99C4-24BE7B827170}"/>
+              </a:ext>
+            </a:extLst>
+          </p:cNvPr>
+          <p:cNvPicPr>
+            <a:picLocks noChangeAspect="1"/>
+          </p:cNvPicPr>
+          <p:nvPr/>
+        </p:nvPicPr>
+        <p:blipFill>
+          <a:blip r:embed="rId7"/>
+          <a:stretch>
+            <a:fillRect/>
+          </a:stretch>
+        </p:blipFill>
+        <p:spPr>
+          <a:xfrm>
+            <a:off x="9275712" y="1422963"/>
+            <a:ext cx="2916288" cy="1542538"/>
+          </a:xfrm>
+          <a:prstGeom prst="rect">
+            <a:avLst/>
+          </a:prstGeom>
+        </p:spPr>
+      </p:pic>
+      <p:sp>
+        <p:nvSpPr>
+          <p:cNvPr id="8" name="TextBox 7">
+            <a:extLst>
+              <a:ext uri="{FF2B5EF4-FFF2-40B4-BE49-F238E27FC236}">
+                <a16:creationId xmlns:a16="http://schemas.microsoft.com/office/drawing/2014/main" id="{3CC9BE41-E813-07B0-CDF6-BA5129777B9F}"/>
+              </a:ext>
+            </a:extLst>
+          </p:cNvPr>
+          <p:cNvSpPr txBox="1"/>
+          <p:nvPr/>
+        </p:nvSpPr>
+        <p:spPr>
+          <a:xfrm>
+            <a:off x="10205175" y="2989985"/>
+            <a:ext cx="1411477" cy="369332"/>
+          </a:xfrm>
+          <a:prstGeom prst="rect">
+            <a:avLst/>
+          </a:prstGeom>
+          <a:noFill/>
+        </p:spPr>
+        <p:txBody>
+          <a:bodyPr wrap="none" rtlCol="0">
+            <a:spAutoFit/>
+          </a:bodyPr>
+          <a:lstStyle/>
+          <a:p>
+            <a:r>
+              <a:rPr lang="en-US" dirty="0">
+                <a:solidFill>
+                  <a:schemeClr val="accent6">
+                    <a:lumMod val="60000"/>
+                    <a:lumOff val="40000"/>
+                  </a:schemeClr>
+                </a:solidFill>
+              </a:rPr>
+              <a:t>Low variance</a:t>
+            </a:r>
+          </a:p>
+        </p:txBody>
+      </p:sp>
+      <p:sp>
+        <p:nvSpPr>
+          <p:cNvPr id="10" name="TextBox 9">
+            <a:extLst>
+              <a:ext uri="{FF2B5EF4-FFF2-40B4-BE49-F238E27FC236}">
+                <a16:creationId xmlns:a16="http://schemas.microsoft.com/office/drawing/2014/main" id="{E6762C16-C2BB-C0EB-4C58-7ADD64FED419}"/>
+              </a:ext>
+            </a:extLst>
+          </p:cNvPr>
+          <p:cNvSpPr txBox="1"/>
+          <p:nvPr/>
+        </p:nvSpPr>
+        <p:spPr>
+          <a:xfrm>
+            <a:off x="10205174" y="5752587"/>
+            <a:ext cx="1455655" cy="369332"/>
+          </a:xfrm>
+          <a:prstGeom prst="rect">
+            <a:avLst/>
+          </a:prstGeom>
+          <a:noFill/>
+        </p:spPr>
+        <p:txBody>
+          <a:bodyPr wrap="none" rtlCol="0">
+            <a:spAutoFit/>
+          </a:bodyPr>
+          <a:lstStyle/>
+          <a:p>
+            <a:r>
+              <a:rPr lang="en-US" dirty="0">
+                <a:solidFill>
+                  <a:schemeClr val="accent6">
+                    <a:lumMod val="60000"/>
+                    <a:lumOff val="40000"/>
+                  </a:schemeClr>
+                </a:solidFill>
+              </a:rPr>
+              <a:t>High variance</a:t>
+            </a:r>
+          </a:p>
+        </p:txBody>
+      </p:sp>
+    </p:spTree>
+    <p:extLst>
+      <p:ext uri="{BB962C8B-B14F-4D97-AF65-F5344CB8AC3E}">
+        <p14:creationId xmlns:p14="http://schemas.microsoft.com/office/powerpoint/2010/main" val="3592568610"/>
+      </p:ext>
+    </p:extLst>
+  </p:cSld>
+  <p:clrMapOvr>
+    <a:masterClrMapping/>
+  </p:clrMapOvr>
+</p:sld>
+</file>
+
+<file path=ppt/slides/slide3.xml><?xml version="1.0" encoding="utf-8"?>
+<p:sld xmlns:a="http://schemas.openxmlformats.org/drawingml/2006/main" xmlns:r="http://schemas.openxmlformats.org/officeDocument/2006/relationships" xmlns:p="http://schemas.openxmlformats.org/presentationml/2006/main">
+  <p:cSld>
+    <p:spTree>
+      <p:nvGrpSpPr>
+        <p:cNvPr id="1" name="">
+          <a:extLst>
+            <a:ext uri="{FF2B5EF4-FFF2-40B4-BE49-F238E27FC236}">
+              <a16:creationId xmlns:a16="http://schemas.microsoft.com/office/drawing/2014/main" id="{9C7A6A27-36A8-2E40-A3D5-6CC4E5B4A7F0}"/>
+            </a:ext>
+          </a:extLst>
+        </p:cNvPr>
+        <p:cNvGrpSpPr/>
+        <p:nvPr/>
+      </p:nvGrpSpPr>
+      <p:grpSpPr>
+        <a:xfrm>
+          <a:off x="0" y="0"/>
+          <a:ext cx="0" cy="0"/>
+          <a:chOff x="0" y="0"/>
+          <a:chExt cx="0" cy="0"/>
+        </a:xfrm>
+      </p:grpSpPr>
+      <p:pic>
+        <p:nvPicPr>
+          <p:cNvPr id="14" name="Picture 13">
+            <a:extLst>
+              <a:ext uri="{FF2B5EF4-FFF2-40B4-BE49-F238E27FC236}">
+                <a16:creationId xmlns:a16="http://schemas.microsoft.com/office/drawing/2014/main" id="{2E713000-D44E-03D9-A284-D602B007D56C}"/>
+              </a:ext>
+            </a:extLst>
+          </p:cNvPr>
+          <p:cNvPicPr>
+            <a:picLocks noChangeAspect="1"/>
+          </p:cNvPicPr>
+          <p:nvPr/>
+        </p:nvPicPr>
+        <p:blipFill>
+          <a:blip r:embed="rId3"/>
+          <a:stretch>
+            <a:fillRect/>
+          </a:stretch>
+        </p:blipFill>
+        <p:spPr>
+          <a:xfrm>
+            <a:off x="7998095" y="1494716"/>
+            <a:ext cx="3879272" cy="2051898"/>
+          </a:xfrm>
+          <a:prstGeom prst="rect">
+            <a:avLst/>
+          </a:prstGeom>
+        </p:spPr>
+      </p:pic>
+      <p:sp>
+        <p:nvSpPr>
+          <p:cNvPr id="2" name="Title 1">
+            <a:extLst>
+              <a:ext uri="{FF2B5EF4-FFF2-40B4-BE49-F238E27FC236}">
+                <a16:creationId xmlns:a16="http://schemas.microsoft.com/office/drawing/2014/main" id="{8494D88D-2AFE-F9E9-5ED2-D2F396C14941}"/>
+              </a:ext>
+            </a:extLst>
+          </p:cNvPr>
+          <p:cNvSpPr>
+            <a:spLocks noGrp="1"/>
+          </p:cNvSpPr>
+          <p:nvPr>
+            <p:ph type="title"/>
+          </p:nvPr>
+        </p:nvSpPr>
+        <p:spPr>
+          <a:xfrm>
+            <a:off x="701964" y="178312"/>
+            <a:ext cx="8799123" cy="529610"/>
+          </a:xfrm>
+        </p:spPr>
+        <p:txBody>
+          <a:bodyPr>
+            <a:noAutofit/>
+          </a:bodyPr>
+          <a:lstStyle/>
+          <a:p>
+            <a:pPr algn="ctr"/>
+            <a:r>
+              <a:rPr lang="en-US" sz="2800" b="1" dirty="0">
+                <a:solidFill>
+                  <a:schemeClr val="accent6">
+                    <a:lumMod val="20000"/>
+                    <a:lumOff val="80000"/>
+                  </a:schemeClr>
+                </a:solidFill>
+              </a:rPr>
+              <a:t>Variance and Standard deviation of population</a:t>
+            </a:r>
+            <a:endParaRPr lang="en-IN" sz="2800" b="1" dirty="0">
+              <a:solidFill>
+                <a:schemeClr val="accent6">
+                  <a:lumMod val="20000"/>
+                  <a:lumOff val="80000"/>
+                </a:schemeClr>
+              </a:solidFill>
+            </a:endParaRPr>
+          </a:p>
+        </p:txBody>
+      </p:sp>
+      <mc:AlternateContent xmlns:mc="http://schemas.openxmlformats.org/markup-compatibility/2006" xmlns:a14="http://schemas.microsoft.com/office/drawing/2010/main">
+        <mc:Choice Requires="a14">
+          <p:sp>
+            <p:nvSpPr>
+              <p:cNvPr id="5" name="TextBox 4">
+                <a:extLst>
+                  <a:ext uri="{FF2B5EF4-FFF2-40B4-BE49-F238E27FC236}">
+                    <a16:creationId xmlns:a16="http://schemas.microsoft.com/office/drawing/2014/main" id="{0E3F86E9-CA74-C277-4749-34EB0C390024}"/>
+                  </a:ext>
+                </a:extLst>
+              </p:cNvPr>
+              <p:cNvSpPr txBox="1"/>
+              <p:nvPr/>
+            </p:nvSpPr>
+            <p:spPr>
+              <a:xfrm>
+                <a:off x="314633" y="876626"/>
+                <a:ext cx="11215951" cy="1323439"/>
+              </a:xfrm>
+              <a:prstGeom prst="rect">
+                <a:avLst/>
+              </a:prstGeom>
+              <a:noFill/>
+            </p:spPr>
+            <p:txBody>
+              <a:bodyPr wrap="square">
+                <a:spAutoFit/>
+              </a:bodyPr>
+              <a:lstStyle/>
               <a:p>
                 <a:r>
                   <a:rPr lang="en-IN" sz="2000" b="1" dirty="0">
@@ -6722,26 +7479,6 @@
                   </a:rPr>
                   <a:t>is the square root of variance. </a:t>
                 </a:r>
-              </a:p>
-              <a:p>
-                <a:endParaRPr lang="en-IN" sz="2000" dirty="0">
-                  <a:solidFill>
-                    <a:schemeClr val="accent6">
-                      <a:lumMod val="40000"/>
-                      <a:lumOff val="60000"/>
-                    </a:schemeClr>
-                  </a:solidFill>
-                </a:endParaRPr>
-              </a:p>
-              <a:p>
-                <a:endParaRPr lang="en-IN" sz="2000" dirty="0">
-                  <a:solidFill>
-                    <a:schemeClr val="accent6">
-                      <a:lumMod val="40000"/>
-                      <a:lumOff val="60000"/>
-                    </a:schemeClr>
-                  </a:solidFill>
-                </a:endParaRPr>
               </a:p>
               <a:p>
                 <a:endParaRPr lang="en-IN" sz="2000" dirty="0">
@@ -7054,13 +7791,13 @@
             </p:txBody>
           </p:sp>
         </mc:Choice>
-        <mc:Fallback>
+        <mc:Fallback xmlns="">
           <p:sp>
             <p:nvSpPr>
               <p:cNvPr id="5" name="TextBox 4">
                 <a:extLst>
                   <a:ext uri="{FF2B5EF4-FFF2-40B4-BE49-F238E27FC236}">
-                    <a16:creationId xmlns:a16="http://schemas.microsoft.com/office/drawing/2014/main" id="{489CF35C-365B-DE94-084A-E84350FD26B2}"/>
+                    <a16:creationId xmlns:a16="http://schemas.microsoft.com/office/drawing/2014/main" id="{0E3F86E9-CA74-C277-4749-34EB0C390024}"/>
                   </a:ext>
                 </a:extLst>
               </p:cNvPr>
@@ -7072,15 +7809,15 @@
             <p:spPr>
               <a:xfrm>
                 <a:off x="314633" y="876626"/>
-                <a:ext cx="11215951" cy="5324535"/>
+                <a:ext cx="11215951" cy="1323439"/>
               </a:xfrm>
               <a:prstGeom prst="rect">
                 <a:avLst/>
               </a:prstGeom>
               <a:blipFill>
-                <a:blip r:embed="rId3"/>
+                <a:blip r:embed="rId4"/>
                 <a:stretch>
-                  <a:fillRect l="-598" t="-687" r="-326" b="-1145"/>
+                  <a:fillRect l="-598" t="-2765" b="-7373"/>
                 </a:stretch>
               </a:blipFill>
             </p:spPr>
@@ -7101,40 +7838,10 @@
       </mc:AlternateContent>
       <p:pic>
         <p:nvPicPr>
-          <p:cNvPr id="4" name="Picture 3">
-            <a:extLst>
-              <a:ext uri="{FF2B5EF4-FFF2-40B4-BE49-F238E27FC236}">
-                <a16:creationId xmlns:a16="http://schemas.microsoft.com/office/drawing/2014/main" id="{E9571FDD-5811-8BEB-CCA6-11D3E57C3662}"/>
-              </a:ext>
-            </a:extLst>
-          </p:cNvPr>
-          <p:cNvPicPr>
-            <a:picLocks noChangeAspect="1"/>
-          </p:cNvPicPr>
-          <p:nvPr/>
-        </p:nvPicPr>
-        <p:blipFill>
-          <a:blip r:embed="rId4"/>
-          <a:stretch>
-            <a:fillRect/>
-          </a:stretch>
-        </p:blipFill>
-        <p:spPr>
-          <a:xfrm>
-            <a:off x="817553" y="1641020"/>
-            <a:ext cx="5793477" cy="1106424"/>
-          </a:xfrm>
-          <a:prstGeom prst="rect">
-            <a:avLst/>
-          </a:prstGeom>
-        </p:spPr>
-      </p:pic>
-      <p:pic>
-        <p:nvPicPr>
           <p:cNvPr id="8" name="Picture 7">
             <a:extLst>
               <a:ext uri="{FF2B5EF4-FFF2-40B4-BE49-F238E27FC236}">
-                <a16:creationId xmlns:a16="http://schemas.microsoft.com/office/drawing/2014/main" id="{A6C1D9A4-233F-11BE-958B-0A099AC86EED}"/>
+                <a16:creationId xmlns:a16="http://schemas.microsoft.com/office/drawing/2014/main" id="{CBDE1309-F39B-AD33-EC4B-5E0FAE2A1407}"/>
               </a:ext>
             </a:extLst>
           </p:cNvPr>
@@ -7151,7 +7858,7 @@
         </p:blipFill>
         <p:spPr>
           <a:xfrm>
-            <a:off x="1759385" y="4972141"/>
+            <a:off x="451793" y="2368769"/>
             <a:ext cx="4054607" cy="346830"/>
           </a:xfrm>
           <a:prstGeom prst="rect">
@@ -7164,7 +7871,7 @@
           <p:cNvPr id="12" name="Picture 11">
             <a:extLst>
               <a:ext uri="{FF2B5EF4-FFF2-40B4-BE49-F238E27FC236}">
-                <a16:creationId xmlns:a16="http://schemas.microsoft.com/office/drawing/2014/main" id="{31341B3C-E06A-168F-803A-208A0A62CF79}"/>
+                <a16:creationId xmlns:a16="http://schemas.microsoft.com/office/drawing/2014/main" id="{7C484CB5-7CBA-4180-8AE5-6EE83091D5F3}"/>
               </a:ext>
             </a:extLst>
           </p:cNvPr>
@@ -7189,42 +7896,12 @@
           </a:prstGeom>
         </p:spPr>
       </p:pic>
-      <p:pic>
-        <p:nvPicPr>
-          <p:cNvPr id="14" name="Picture 13">
-            <a:extLst>
-              <a:ext uri="{FF2B5EF4-FFF2-40B4-BE49-F238E27FC236}">
-                <a16:creationId xmlns:a16="http://schemas.microsoft.com/office/drawing/2014/main" id="{F6BCE6DF-C49E-6FAD-445F-EE162E3CC356}"/>
-              </a:ext>
-            </a:extLst>
-          </p:cNvPr>
-          <p:cNvPicPr>
-            <a:picLocks noChangeAspect="1"/>
-          </p:cNvPicPr>
-          <p:nvPr/>
-        </p:nvPicPr>
-        <p:blipFill>
-          <a:blip r:embed="rId7"/>
-          <a:stretch>
-            <a:fillRect/>
-          </a:stretch>
-        </p:blipFill>
-        <p:spPr>
-          <a:xfrm>
-            <a:off x="7998095" y="1494716"/>
-            <a:ext cx="3879272" cy="2051898"/>
-          </a:xfrm>
-          <a:prstGeom prst="rect">
-            <a:avLst/>
-          </a:prstGeom>
-        </p:spPr>
-      </p:pic>
       <p:sp>
         <p:nvSpPr>
           <p:cNvPr id="3" name="TextBox 2">
             <a:extLst>
               <a:ext uri="{FF2B5EF4-FFF2-40B4-BE49-F238E27FC236}">
-                <a16:creationId xmlns:a16="http://schemas.microsoft.com/office/drawing/2014/main" id="{FC3ED2B0-8C6E-18BE-D392-55E26C87436F}"/>
+                <a16:creationId xmlns:a16="http://schemas.microsoft.com/office/drawing/2014/main" id="{00F7DAEB-7DC5-F3D2-FE47-D78C9E9A1492}"/>
               </a:ext>
             </a:extLst>
           </p:cNvPr>
@@ -7266,7 +7943,7 @@
           <p:cNvPr id="6" name="TextBox 5">
             <a:extLst>
               <a:ext uri="{FF2B5EF4-FFF2-40B4-BE49-F238E27FC236}">
-                <a16:creationId xmlns:a16="http://schemas.microsoft.com/office/drawing/2014/main" id="{1E62695B-6A98-2ED3-C044-3F282F9B99D9}"/>
+                <a16:creationId xmlns:a16="http://schemas.microsoft.com/office/drawing/2014/main" id="{EC680742-65A6-5943-80C8-4CFB41FC7C84}"/>
               </a:ext>
             </a:extLst>
           </p:cNvPr>
@@ -7314,10 +7991,40 @@
           </a:p>
         </p:txBody>
       </p:sp>
+      <p:pic>
+        <p:nvPicPr>
+          <p:cNvPr id="11" name="Picture 10">
+            <a:extLst>
+              <a:ext uri="{FF2B5EF4-FFF2-40B4-BE49-F238E27FC236}">
+                <a16:creationId xmlns:a16="http://schemas.microsoft.com/office/drawing/2014/main" id="{30735F67-F274-AB35-4DD0-D99132A9C730}"/>
+              </a:ext>
+            </a:extLst>
+          </p:cNvPr>
+          <p:cNvPicPr>
+            <a:picLocks noChangeAspect="1"/>
+          </p:cNvPicPr>
+          <p:nvPr/>
+        </p:nvPicPr>
+        <p:blipFill>
+          <a:blip r:embed="rId7"/>
+          <a:stretch>
+            <a:fillRect/>
+          </a:stretch>
+        </p:blipFill>
+        <p:spPr>
+          <a:xfrm>
+            <a:off x="141590" y="3492107"/>
+            <a:ext cx="8104632" cy="3000657"/>
+          </a:xfrm>
+          <a:prstGeom prst="rect">
+            <a:avLst/>
+          </a:prstGeom>
+        </p:spPr>
+      </p:pic>
     </p:spTree>
     <p:extLst>
       <p:ext uri="{BB962C8B-B14F-4D97-AF65-F5344CB8AC3E}">
-        <p14:creationId xmlns:p14="http://schemas.microsoft.com/office/powerpoint/2010/main" val="3592568610"/>
+        <p14:creationId xmlns:p14="http://schemas.microsoft.com/office/powerpoint/2010/main" val="3887591034"/>
       </p:ext>
     </p:extLst>
   </p:cSld>
@@ -7327,7 +8034,7 @@
 </p:sld>
 </file>
 
-<file path=ppt/slides/slide3.xml><?xml version="1.0" encoding="utf-8"?>
+<file path=ppt/slides/slide4.xml><?xml version="1.0" encoding="utf-8"?>
 <p:sld xmlns:a="http://schemas.openxmlformats.org/drawingml/2006/main" xmlns:r="http://schemas.openxmlformats.org/officeDocument/2006/relationships" xmlns:p="http://schemas.openxmlformats.org/presentationml/2006/main">
   <p:cSld>
     <p:spTree>
@@ -7344,8 +8051,8 @@
           <a:chExt cx="0" cy="0"/>
         </a:xfrm>
       </p:grpSpPr>
-      <mc:AlternateContent xmlns:mc="http://schemas.openxmlformats.org/markup-compatibility/2006">
-        <mc:Choice xmlns:a14="http://schemas.microsoft.com/office/drawing/2010/main" Requires="a14">
+      <mc:AlternateContent xmlns:mc="http://schemas.openxmlformats.org/markup-compatibility/2006" xmlns:a14="http://schemas.microsoft.com/office/drawing/2010/main">
+        <mc:Choice Requires="a14">
           <p:sp>
             <p:nvSpPr>
               <p:cNvPr id="10" name="TextBox 9">
@@ -7716,7 +8423,7 @@
             </p:txBody>
           </p:sp>
         </mc:Choice>
-        <mc:Fallback>
+        <mc:Fallback xmlns="">
           <p:sp>
             <p:nvSpPr>
               <p:cNvPr id="10" name="TextBox 9">
@@ -7834,7 +8541,7 @@
 </p:sld>
 </file>
 
-<file path=ppt/slides/slide4.xml><?xml version="1.0" encoding="utf-8"?>
+<file path=ppt/slides/slide5.xml><?xml version="1.0" encoding="utf-8"?>
 <p:sld xmlns:a="http://schemas.openxmlformats.org/drawingml/2006/main" xmlns:r="http://schemas.openxmlformats.org/officeDocument/2006/relationships" xmlns:p="http://schemas.openxmlformats.org/presentationml/2006/main">
   <p:cSld>
     <p:spTree>
@@ -7857,8 +8564,8 @@
           <a:chExt cx="0" cy="0"/>
         </a:xfrm>
       </p:grpSpPr>
-      <mc:AlternateContent xmlns:mc="http://schemas.openxmlformats.org/markup-compatibility/2006">
-        <mc:Choice xmlns:a14="http://schemas.microsoft.com/office/drawing/2010/main" Requires="a14">
+      <mc:AlternateContent xmlns:mc="http://schemas.openxmlformats.org/markup-compatibility/2006" xmlns:a14="http://schemas.microsoft.com/office/drawing/2010/main">
+        <mc:Choice Requires="a14">
           <p:sp>
             <p:nvSpPr>
               <p:cNvPr id="10" name="TextBox 9">
@@ -8259,7 +8966,7 @@
             </p:txBody>
           </p:sp>
         </mc:Choice>
-        <mc:Fallback>
+        <mc:Fallback xmlns="">
           <p:sp>
             <p:nvSpPr>
               <p:cNvPr id="10" name="TextBox 9">
@@ -8377,7 +9084,7 @@
 </p:sld>
 </file>
 
-<file path=ppt/slides/slide5.xml><?xml version="1.0" encoding="utf-8"?>
+<file path=ppt/slides/slide6.xml><?xml version="1.0" encoding="utf-8"?>
 <p:sld xmlns:a="http://schemas.openxmlformats.org/drawingml/2006/main" xmlns:r="http://schemas.openxmlformats.org/officeDocument/2006/relationships" xmlns:p="http://schemas.openxmlformats.org/presentationml/2006/main">
   <p:cSld>
     <p:spTree>
@@ -8400,8 +9107,8 @@
           <a:chExt cx="0" cy="0"/>
         </a:xfrm>
       </p:grpSpPr>
-      <mc:AlternateContent xmlns:mc="http://schemas.openxmlformats.org/markup-compatibility/2006">
-        <mc:Choice xmlns:a14="http://schemas.microsoft.com/office/drawing/2010/main" Requires="a14">
+      <mc:AlternateContent xmlns:mc="http://schemas.openxmlformats.org/markup-compatibility/2006" xmlns:a14="http://schemas.microsoft.com/office/drawing/2010/main">
+        <mc:Choice Requires="a14">
           <p:sp>
             <p:nvSpPr>
               <p:cNvPr id="10" name="TextBox 9">
@@ -8802,7 +9509,7 @@
             </p:txBody>
           </p:sp>
         </mc:Choice>
-        <mc:Fallback>
+        <mc:Fallback xmlns="">
           <p:sp>
             <p:nvSpPr>
               <p:cNvPr id="10" name="TextBox 9">
@@ -8925,7 +9632,7 @@
 </p:sld>
 </file>
 
-<file path=ppt/slides/slide6.xml><?xml version="1.0" encoding="utf-8"?>
+<file path=ppt/slides/slide7.xml><?xml version="1.0" encoding="utf-8"?>
 <p:sld xmlns:a="http://schemas.openxmlformats.org/drawingml/2006/main" xmlns:r="http://schemas.openxmlformats.org/officeDocument/2006/relationships" xmlns:p="http://schemas.openxmlformats.org/presentationml/2006/main">
   <p:cSld>
     <p:spTree>
@@ -9600,7 +10307,7 @@
 </p:sld>
 </file>
 
-<file path=ppt/slides/slide7.xml><?xml version="1.0" encoding="utf-8"?>
+<file path=ppt/slides/slide8.xml><?xml version="1.0" encoding="utf-8"?>
 <p:sld xmlns:a="http://schemas.openxmlformats.org/drawingml/2006/main" xmlns:r="http://schemas.openxmlformats.org/officeDocument/2006/relationships" xmlns:p="http://schemas.openxmlformats.org/presentationml/2006/main">
   <p:cSld>
     <p:spTree>
@@ -9784,7 +10491,7 @@
 </p:sld>
 </file>
 
-<file path=ppt/slides/slide8.xml><?xml version="1.0" encoding="utf-8"?>
+<file path=ppt/slides/slide9.xml><?xml version="1.0" encoding="utf-8"?>
 <p:sld xmlns:a="http://schemas.openxmlformats.org/drawingml/2006/main" xmlns:r="http://schemas.openxmlformats.org/officeDocument/2006/relationships" xmlns:p="http://schemas.openxmlformats.org/presentationml/2006/main">
   <p:cSld>
     <p:spTree>
@@ -9973,293 +10680,6 @@
     <p:extLst>
       <p:ext uri="{BB962C8B-B14F-4D97-AF65-F5344CB8AC3E}">
         <p14:creationId xmlns:p14="http://schemas.microsoft.com/office/powerpoint/2010/main" val="3740293880"/>
-      </p:ext>
-    </p:extLst>
-  </p:cSld>
-  <p:clrMapOvr>
-    <a:masterClrMapping/>
-  </p:clrMapOvr>
-</p:sld>
-</file>
-
-<file path=ppt/slides/slide9.xml><?xml version="1.0" encoding="utf-8"?>
-<p:sld xmlns:a="http://schemas.openxmlformats.org/drawingml/2006/main" xmlns:r="http://schemas.openxmlformats.org/officeDocument/2006/relationships" xmlns:p="http://schemas.openxmlformats.org/presentationml/2006/main">
-  <p:cSld>
-    <p:spTree>
-      <p:nvGrpSpPr>
-        <p:cNvPr id="1" name=""/>
-        <p:cNvGrpSpPr/>
-        <p:nvPr/>
-      </p:nvGrpSpPr>
-      <p:grpSpPr>
-        <a:xfrm>
-          <a:off x="0" y="0"/>
-          <a:ext cx="0" cy="0"/>
-          <a:chOff x="0" y="0"/>
-          <a:chExt cx="0" cy="0"/>
-        </a:xfrm>
-      </p:grpSpPr>
-      <p:sp>
-        <p:nvSpPr>
-          <p:cNvPr id="2" name="Title 1">
-            <a:extLst>
-              <a:ext uri="{FF2B5EF4-FFF2-40B4-BE49-F238E27FC236}">
-                <a16:creationId xmlns:a16="http://schemas.microsoft.com/office/drawing/2014/main" id="{8A5E0465-9511-9203-167F-377222E8CC85}"/>
-              </a:ext>
-            </a:extLst>
-          </p:cNvPr>
-          <p:cNvSpPr>
-            <a:spLocks noGrp="1"/>
-          </p:cNvSpPr>
-          <p:nvPr>
-            <p:ph type="title"/>
-          </p:nvPr>
-        </p:nvSpPr>
-        <p:spPr>
-          <a:xfrm>
-            <a:off x="591312" y="365125"/>
-            <a:ext cx="7016496" cy="750443"/>
-          </a:xfrm>
-        </p:spPr>
-        <p:txBody>
-          <a:bodyPr>
-            <a:normAutofit/>
-          </a:bodyPr>
-          <a:lstStyle/>
-          <a:p>
-            <a:r>
-              <a:rPr lang="en-US" sz="2800" dirty="0">
-                <a:solidFill>
-                  <a:schemeClr val="accent6">
-                    <a:lumMod val="20000"/>
-                    <a:lumOff val="80000"/>
-                  </a:schemeClr>
-                </a:solidFill>
-              </a:rPr>
-              <a:t>Why the 2 measure: variance and std. dev.?</a:t>
-            </a:r>
-          </a:p>
-        </p:txBody>
-      </p:sp>
-      <p:sp>
-        <p:nvSpPr>
-          <p:cNvPr id="10" name="TextBox 9">
-            <a:extLst>
-              <a:ext uri="{FF2B5EF4-FFF2-40B4-BE49-F238E27FC236}">
-                <a16:creationId xmlns:a16="http://schemas.microsoft.com/office/drawing/2014/main" id="{91FB00DD-FBD5-FA23-D94D-174B106C5385}"/>
-              </a:ext>
-            </a:extLst>
-          </p:cNvPr>
-          <p:cNvSpPr txBox="1"/>
-          <p:nvPr/>
-        </p:nvSpPr>
-        <p:spPr>
-          <a:xfrm>
-            <a:off x="274320" y="1395675"/>
-            <a:ext cx="11201400" cy="2554545"/>
-          </a:xfrm>
-          <a:prstGeom prst="rect">
-            <a:avLst/>
-          </a:prstGeom>
-          <a:noFill/>
-        </p:spPr>
-        <p:txBody>
-          <a:bodyPr wrap="square">
-            <a:spAutoFit/>
-          </a:bodyPr>
-          <a:lstStyle/>
-          <a:p>
-            <a:r>
-              <a:rPr lang="en-US" sz="2000" dirty="0">
-                <a:solidFill>
-                  <a:schemeClr val="accent6">
-                    <a:lumMod val="60000"/>
-                    <a:lumOff val="40000"/>
-                  </a:schemeClr>
-                </a:solidFill>
-              </a:rPr>
-              <a:t>Variance is the average squared deviation from the mean. So, </a:t>
-            </a:r>
-            <a:r>
-              <a:rPr lang="en-US" sz="2000" b="1" dirty="0">
-                <a:solidFill>
-                  <a:schemeClr val="accent6">
-                    <a:lumMod val="60000"/>
-                    <a:lumOff val="40000"/>
-                  </a:schemeClr>
-                </a:solidFill>
-              </a:rPr>
-              <a:t>if your data is in, say, cm, then variance is in square cm (cm²). </a:t>
-            </a:r>
-            <a:r>
-              <a:rPr lang="en-US" sz="2000" dirty="0">
-                <a:solidFill>
-                  <a:schemeClr val="accent6">
-                    <a:lumMod val="60000"/>
-                    <a:lumOff val="40000"/>
-                  </a:schemeClr>
-                </a:solidFill>
-              </a:rPr>
-              <a:t>Squared units aren’t directly interpretable: nobody says “the spread of your height is 100 cm²”.</a:t>
-            </a:r>
-          </a:p>
-          <a:p>
-            <a:endParaRPr lang="en-US" sz="2000" dirty="0">
-              <a:solidFill>
-                <a:schemeClr val="accent6">
-                  <a:lumMod val="60000"/>
-                  <a:lumOff val="40000"/>
-                </a:schemeClr>
-              </a:solidFill>
-            </a:endParaRPr>
-          </a:p>
-          <a:p>
-            <a:r>
-              <a:rPr lang="en-US" sz="2000" dirty="0">
-                <a:solidFill>
-                  <a:schemeClr val="accent6">
-                    <a:lumMod val="60000"/>
-                    <a:lumOff val="40000"/>
-                  </a:schemeClr>
-                </a:solidFill>
-              </a:rPr>
-              <a:t>By taking the square root as in standard deviation, you bring the units back to the original scale: cm -&gt; cm </a:t>
-            </a:r>
-          </a:p>
-          <a:p>
-            <a:pPr marL="285750" indent="-285750">
-              <a:buFont typeface="Arial" panose="020B0604020202020204" pitchFamily="34" charset="0"/>
-              <a:buChar char="•"/>
-            </a:pPr>
-            <a:endParaRPr lang="en-US" sz="2000" dirty="0">
-              <a:solidFill>
-                <a:schemeClr val="accent6">
-                  <a:lumMod val="60000"/>
-                  <a:lumOff val="40000"/>
-                </a:schemeClr>
-              </a:solidFill>
-            </a:endParaRPr>
-          </a:p>
-          <a:p>
-            <a:r>
-              <a:rPr lang="en-US" sz="2000" dirty="0">
-                <a:solidFill>
-                  <a:schemeClr val="accent6">
-                    <a:lumMod val="60000"/>
-                    <a:lumOff val="40000"/>
-                  </a:schemeClr>
-                </a:solidFill>
-              </a:rPr>
-              <a:t>If the mean height is 170 cm and variance is 100 cm²,  then standard deviation would 10 cm:  that is , you can say </a:t>
-            </a:r>
-            <a:r>
-              <a:rPr lang="en-US" sz="2000" b="1" dirty="0">
-                <a:solidFill>
-                  <a:schemeClr val="accent6">
-                    <a:lumMod val="60000"/>
-                    <a:lumOff val="40000"/>
-                  </a:schemeClr>
-                </a:solidFill>
-              </a:rPr>
-              <a:t>“Most data is within 10 cm above or below the mean.”</a:t>
-            </a:r>
-          </a:p>
-        </p:txBody>
-      </p:sp>
-      <p:pic>
-        <p:nvPicPr>
-          <p:cNvPr id="4" name="Picture 3">
-            <a:extLst>
-              <a:ext uri="{FF2B5EF4-FFF2-40B4-BE49-F238E27FC236}">
-                <a16:creationId xmlns:a16="http://schemas.microsoft.com/office/drawing/2014/main" id="{6495780A-3788-F32E-340D-CC324600455A}"/>
-              </a:ext>
-            </a:extLst>
-          </p:cNvPr>
-          <p:cNvPicPr>
-            <a:picLocks noChangeAspect="1"/>
-          </p:cNvPicPr>
-          <p:nvPr/>
-        </p:nvPicPr>
-        <p:blipFill>
-          <a:blip r:embed="rId2"/>
-          <a:stretch>
-            <a:fillRect/>
-          </a:stretch>
-        </p:blipFill>
-        <p:spPr>
-          <a:xfrm>
-            <a:off x="7086750" y="4538104"/>
-            <a:ext cx="4574617" cy="1695853"/>
-          </a:xfrm>
-          <a:prstGeom prst="rect">
-            <a:avLst/>
-          </a:prstGeom>
-        </p:spPr>
-      </p:pic>
-      <p:pic>
-        <p:nvPicPr>
-          <p:cNvPr id="3" name="Picture 2">
-            <a:extLst>
-              <a:ext uri="{FF2B5EF4-FFF2-40B4-BE49-F238E27FC236}">
-                <a16:creationId xmlns:a16="http://schemas.microsoft.com/office/drawing/2014/main" id="{642468CC-9AAC-C490-5589-514AB167B052}"/>
-              </a:ext>
-            </a:extLst>
-          </p:cNvPr>
-          <p:cNvPicPr>
-            <a:picLocks noChangeAspect="1"/>
-          </p:cNvPicPr>
-          <p:nvPr/>
-        </p:nvPicPr>
-        <p:blipFill>
-          <a:blip r:embed="rId3"/>
-          <a:stretch>
-            <a:fillRect/>
-          </a:stretch>
-        </p:blipFill>
-        <p:spPr>
-          <a:xfrm>
-            <a:off x="373838" y="4611256"/>
-            <a:ext cx="5869423" cy="1120928"/>
-          </a:xfrm>
-          <a:prstGeom prst="rect">
-            <a:avLst/>
-          </a:prstGeom>
-        </p:spPr>
-      </p:pic>
-      <p:pic>
-        <p:nvPicPr>
-          <p:cNvPr id="5" name="Picture 4">
-            <a:extLst>
-              <a:ext uri="{FF2B5EF4-FFF2-40B4-BE49-F238E27FC236}">
-                <a16:creationId xmlns:a16="http://schemas.microsoft.com/office/drawing/2014/main" id="{A4C18753-DE5D-13C8-A4BB-D1187DEFD097}"/>
-              </a:ext>
-            </a:extLst>
-          </p:cNvPr>
-          <p:cNvPicPr>
-            <a:picLocks noChangeAspect="1"/>
-          </p:cNvPicPr>
-          <p:nvPr/>
-        </p:nvPicPr>
-        <p:blipFill>
-          <a:blip r:embed="rId4"/>
-          <a:stretch>
-            <a:fillRect/>
-          </a:stretch>
-        </p:blipFill>
-        <p:spPr>
-          <a:xfrm>
-            <a:off x="373838" y="6060542"/>
-            <a:ext cx="4054607" cy="346830"/>
-          </a:xfrm>
-          <a:prstGeom prst="rect">
-            <a:avLst/>
-          </a:prstGeom>
-        </p:spPr>
-      </p:pic>
-    </p:spTree>
-    <p:extLst>
-      <p:ext uri="{BB962C8B-B14F-4D97-AF65-F5344CB8AC3E}">
-        <p14:creationId xmlns:p14="http://schemas.microsoft.com/office/powerpoint/2010/main" val="3281596737"/>
       </p:ext>
     </p:extLst>
   </p:cSld>
